--- a/assets/ElderShield_IIC3_deck.pptx
+++ b/assets/ElderShield_IIC3_deck.pptx
@@ -12883,7 +12883,7 @@
                 <a:cs typeface="Playfair Display"/>
                 <a:sym typeface="Playfair Display"/>
               </a:rPr>
-              <a:t>VOXGUARD — SPOOF-SCORE EVERY VOICE, BEFORE THE PAYMENT</a:t>
+              <a:t>ELDERSHIELD — SPOOF-SCORE EVERY VOICE, BEFORE THE PAYMENT</a:t>
             </a:r>
             <a:endParaRPr dirty="0"/>
           </a:p>
